--- a/Presentation/HabotConnect_Devops_project_ppt.pptx
+++ b/Presentation/HabotConnect_Devops_project_ppt.pptx
@@ -17,9 +17,10 @@
     <p:sldId id="266" r:id="rId11"/>
     <p:sldId id="258" r:id="rId12"/>
     <p:sldId id="267" r:id="rId13"/>
-    <p:sldId id="268" r:id="rId14"/>
-    <p:sldId id="269" r:id="rId15"/>
-    <p:sldId id="270" r:id="rId16"/>
+    <p:sldId id="271" r:id="rId14"/>
+    <p:sldId id="268" r:id="rId15"/>
+    <p:sldId id="269" r:id="rId16"/>
+    <p:sldId id="270" r:id="rId17"/>
   </p:sldIdLst>
   <p:sldSz cx="9144000" cy="6858000" type="screen4x3"/>
   <p:notesSz cx="6858000" cy="9144000"/>
@@ -194,7 +195,7 @@
           <a:noFill/>
           <a:extLst>
             <a:ext uri="{909E8E84-426E-40dd-AFC4-6F175D3DCCD1}">
-              <a14:hiddenFill xmlns:a14="http://schemas.microsoft.com/office/drawing/2010/main" xmlns="">
+              <a14:hiddenFill xmlns="" xmlns:a14="http://schemas.microsoft.com/office/drawing/2010/main">
                 <a:solidFill>
                   <a:srgbClr val="FFFFFF"/>
                 </a:solidFill>
@@ -254,7 +255,7 @@
             </a:ln>
             <a:extLst>
               <a:ext uri="{91240B29-F687-4f45-9708-019B960494DF}">
-                <a14:hiddenLine xmlns:a14="http://schemas.microsoft.com/office/drawing/2010/main" xmlns="" w="9525">
+                <a14:hiddenLine xmlns="" xmlns:a14="http://schemas.microsoft.com/office/drawing/2010/main" w="9525">
                   <a:solidFill>
                     <a:srgbClr val="000000"/>
                   </a:solidFill>
@@ -344,7 +345,7 @@
             </a:ln>
             <a:extLst>
               <a:ext uri="{91240B29-F687-4f45-9708-019B960494DF}">
-                <a14:hiddenLine xmlns:a14="http://schemas.microsoft.com/office/drawing/2010/main" xmlns="" w="9525">
+                <a14:hiddenLine xmlns="" xmlns:a14="http://schemas.microsoft.com/office/drawing/2010/main" w="9525">
                   <a:solidFill>
                     <a:srgbClr val="000000"/>
                   </a:solidFill>
@@ -434,7 +435,7 @@
             </a:ln>
             <a:extLst>
               <a:ext uri="{91240B29-F687-4f45-9708-019B960494DF}">
-                <a14:hiddenLine xmlns:a14="http://schemas.microsoft.com/office/drawing/2010/main" xmlns="" w="9525">
+                <a14:hiddenLine xmlns="" xmlns:a14="http://schemas.microsoft.com/office/drawing/2010/main" w="9525">
                   <a:solidFill>
                     <a:srgbClr val="000000"/>
                   </a:solidFill>
@@ -468,7 +469,7 @@
             </a:ln>
             <a:extLst>
               <a:ext uri="{91240B29-F687-4f45-9708-019B960494DF}">
-                <a14:hiddenLine xmlns:a14="http://schemas.microsoft.com/office/drawing/2010/main" xmlns="" w="9525">
+                <a14:hiddenLine xmlns="" xmlns:a14="http://schemas.microsoft.com/office/drawing/2010/main" w="9525">
                   <a:solidFill>
                     <a:srgbClr val="000000"/>
                   </a:solidFill>
@@ -558,7 +559,7 @@
             </a:ln>
             <a:extLst>
               <a:ext uri="{91240B29-F687-4f45-9708-019B960494DF}">
-                <a14:hiddenLine xmlns:a14="http://schemas.microsoft.com/office/drawing/2010/main" xmlns="" w="9525">
+                <a14:hiddenLine xmlns="" xmlns:a14="http://schemas.microsoft.com/office/drawing/2010/main" w="9525">
                   <a:solidFill>
                     <a:srgbClr val="000000"/>
                   </a:solidFill>
@@ -620,7 +621,7 @@
             </a:ln>
             <a:extLst>
               <a:ext uri="{91240B29-F687-4f45-9708-019B960494DF}">
-                <a14:hiddenLine xmlns:a14="http://schemas.microsoft.com/office/drawing/2010/main" xmlns="" w="9525">
+                <a14:hiddenLine xmlns="" xmlns:a14="http://schemas.microsoft.com/office/drawing/2010/main" w="9525">
                   <a:solidFill>
                     <a:srgbClr val="000000"/>
                   </a:solidFill>
@@ -682,7 +683,7 @@
             </a:ln>
             <a:extLst>
               <a:ext uri="{91240B29-F687-4f45-9708-019B960494DF}">
-                <a14:hiddenLine xmlns:a14="http://schemas.microsoft.com/office/drawing/2010/main" xmlns="" w="9525">
+                <a14:hiddenLine xmlns="" xmlns:a14="http://schemas.microsoft.com/office/drawing/2010/main" w="9525">
                   <a:solidFill>
                     <a:srgbClr val="000000"/>
                   </a:solidFill>
@@ -772,7 +773,7 @@
             </a:ln>
             <a:extLst>
               <a:ext uri="{91240B29-F687-4f45-9708-019B960494DF}">
-                <a14:hiddenLine xmlns:a14="http://schemas.microsoft.com/office/drawing/2010/main" xmlns="" w="9525">
+                <a14:hiddenLine xmlns="" xmlns:a14="http://schemas.microsoft.com/office/drawing/2010/main" w="9525">
                   <a:solidFill>
                     <a:srgbClr val="000000"/>
                   </a:solidFill>
@@ -834,7 +835,7 @@
             </a:ln>
             <a:extLst>
               <a:ext uri="{91240B29-F687-4f45-9708-019B960494DF}">
-                <a14:hiddenLine xmlns:a14="http://schemas.microsoft.com/office/drawing/2010/main" xmlns="" w="9525">
+                <a14:hiddenLine xmlns="" xmlns:a14="http://schemas.microsoft.com/office/drawing/2010/main" w="9525">
                   <a:solidFill>
                     <a:srgbClr val="000000"/>
                   </a:solidFill>
@@ -896,7 +897,7 @@
             </a:ln>
             <a:extLst>
               <a:ext uri="{91240B29-F687-4f45-9708-019B960494DF}">
-                <a14:hiddenLine xmlns:a14="http://schemas.microsoft.com/office/drawing/2010/main" xmlns="" w="9525">
+                <a14:hiddenLine xmlns="" xmlns:a14="http://schemas.microsoft.com/office/drawing/2010/main" w="9525">
                   <a:solidFill>
                     <a:srgbClr val="000000"/>
                   </a:solidFill>
@@ -986,7 +987,7 @@
             </a:ln>
             <a:extLst>
               <a:ext uri="{91240B29-F687-4f45-9708-019B960494DF}">
-                <a14:hiddenLine xmlns:a14="http://schemas.microsoft.com/office/drawing/2010/main" xmlns="" w="9525">
+                <a14:hiddenLine xmlns="" xmlns:a14="http://schemas.microsoft.com/office/drawing/2010/main" w="9525">
                   <a:solidFill>
                     <a:srgbClr val="000000"/>
                   </a:solidFill>
@@ -1076,7 +1077,7 @@
             </a:ln>
             <a:extLst>
               <a:ext uri="{91240B29-F687-4f45-9708-019B960494DF}">
-                <a14:hiddenLine xmlns:a14="http://schemas.microsoft.com/office/drawing/2010/main" xmlns="" w="9525">
+                <a14:hiddenLine xmlns="" xmlns:a14="http://schemas.microsoft.com/office/drawing/2010/main" w="9525">
                   <a:solidFill>
                     <a:srgbClr val="000000"/>
                   </a:solidFill>
@@ -1138,7 +1139,7 @@
             </a:ln>
             <a:extLst>
               <a:ext uri="{91240B29-F687-4f45-9708-019B960494DF}">
-                <a14:hiddenLine xmlns:a14="http://schemas.microsoft.com/office/drawing/2010/main" xmlns="" w="9525">
+                <a14:hiddenLine xmlns="" xmlns:a14="http://schemas.microsoft.com/office/drawing/2010/main" w="9525">
                   <a:solidFill>
                     <a:srgbClr val="000000"/>
                   </a:solidFill>
@@ -1248,7 +1249,7 @@
             </a:ln>
             <a:extLst>
               <a:ext uri="{91240B29-F687-4f45-9708-019B960494DF}">
-                <a14:hiddenLine xmlns:a14="http://schemas.microsoft.com/office/drawing/2010/main" xmlns="" w="9525">
+                <a14:hiddenLine xmlns="" xmlns:a14="http://schemas.microsoft.com/office/drawing/2010/main" w="9525">
                   <a:solidFill>
                     <a:srgbClr val="000000"/>
                   </a:solidFill>
@@ -1310,7 +1311,7 @@
             </a:ln>
             <a:extLst>
               <a:ext uri="{91240B29-F687-4f45-9708-019B960494DF}">
-                <a14:hiddenLine xmlns:a14="http://schemas.microsoft.com/office/drawing/2010/main" xmlns="" w="9525">
+                <a14:hiddenLine xmlns="" xmlns:a14="http://schemas.microsoft.com/office/drawing/2010/main" w="9525">
                   <a:solidFill>
                     <a:srgbClr val="000000"/>
                   </a:solidFill>
@@ -1400,7 +1401,7 @@
             </a:ln>
             <a:extLst>
               <a:ext uri="{91240B29-F687-4f45-9708-019B960494DF}">
-                <a14:hiddenLine xmlns:a14="http://schemas.microsoft.com/office/drawing/2010/main" xmlns="" w="9525">
+                <a14:hiddenLine xmlns="" xmlns:a14="http://schemas.microsoft.com/office/drawing/2010/main" w="9525">
                   <a:solidFill>
                     <a:srgbClr val="000000"/>
                   </a:solidFill>
@@ -1490,7 +1491,7 @@
             </a:ln>
             <a:extLst>
               <a:ext uri="{91240B29-F687-4f45-9708-019B960494DF}">
-                <a14:hiddenLine xmlns:a14="http://schemas.microsoft.com/office/drawing/2010/main" xmlns="" w="9525">
+                <a14:hiddenLine xmlns="" xmlns:a14="http://schemas.microsoft.com/office/drawing/2010/main" w="9525">
                   <a:solidFill>
                     <a:srgbClr val="000000"/>
                   </a:solidFill>
@@ -1552,7 +1553,7 @@
             </a:ln>
             <a:extLst>
               <a:ext uri="{91240B29-F687-4f45-9708-019B960494DF}">
-                <a14:hiddenLine xmlns:a14="http://schemas.microsoft.com/office/drawing/2010/main" xmlns="" w="9525">
+                <a14:hiddenLine xmlns="" xmlns:a14="http://schemas.microsoft.com/office/drawing/2010/main" w="9525">
                   <a:solidFill>
                     <a:srgbClr val="000000"/>
                   </a:solidFill>
@@ -1642,7 +1643,7 @@
             </a:ln>
             <a:extLst>
               <a:ext uri="{91240B29-F687-4f45-9708-019B960494DF}">
-                <a14:hiddenLine xmlns:a14="http://schemas.microsoft.com/office/drawing/2010/main" xmlns="" w="9525">
+                <a14:hiddenLine xmlns="" xmlns:a14="http://schemas.microsoft.com/office/drawing/2010/main" w="9525">
                   <a:solidFill>
                     <a:srgbClr val="000000"/>
                   </a:solidFill>
@@ -1732,7 +1733,7 @@
             </a:ln>
             <a:extLst>
               <a:ext uri="{91240B29-F687-4f45-9708-019B960494DF}">
-                <a14:hiddenLine xmlns:a14="http://schemas.microsoft.com/office/drawing/2010/main" xmlns="" w="9525">
+                <a14:hiddenLine xmlns="" xmlns:a14="http://schemas.microsoft.com/office/drawing/2010/main" w="9525">
                   <a:solidFill>
                     <a:srgbClr val="000000"/>
                   </a:solidFill>
@@ -1788,7 +1789,7 @@
             </a:ln>
             <a:extLst>
               <a:ext uri="{91240B29-F687-4f45-9708-019B960494DF}">
-                <a14:hiddenLine xmlns:a14="http://schemas.microsoft.com/office/drawing/2010/main" xmlns="" w="9525">
+                <a14:hiddenLine xmlns="" xmlns:a14="http://schemas.microsoft.com/office/drawing/2010/main" w="9525">
                   <a:solidFill>
                     <a:srgbClr val="000000"/>
                   </a:solidFill>
@@ -1878,7 +1879,7 @@
             </a:ln>
             <a:extLst>
               <a:ext uri="{91240B29-F687-4f45-9708-019B960494DF}">
-                <a14:hiddenLine xmlns:a14="http://schemas.microsoft.com/office/drawing/2010/main" xmlns="" w="9525">
+                <a14:hiddenLine xmlns="" xmlns:a14="http://schemas.microsoft.com/office/drawing/2010/main" w="9525">
                   <a:solidFill>
                     <a:srgbClr val="000000"/>
                   </a:solidFill>
@@ -1934,7 +1935,7 @@
             </a:ln>
             <a:extLst>
               <a:ext uri="{91240B29-F687-4f45-9708-019B960494DF}">
-                <a14:hiddenLine xmlns:a14="http://schemas.microsoft.com/office/drawing/2010/main" xmlns="" w="9525">
+                <a14:hiddenLine xmlns="" xmlns:a14="http://schemas.microsoft.com/office/drawing/2010/main" w="9525">
                   <a:solidFill>
                     <a:srgbClr val="000000"/>
                   </a:solidFill>
@@ -2024,7 +2025,7 @@
             </a:ln>
             <a:extLst>
               <a:ext uri="{91240B29-F687-4f45-9708-019B960494DF}">
-                <a14:hiddenLine xmlns:a14="http://schemas.microsoft.com/office/drawing/2010/main" xmlns="" w="9525">
+                <a14:hiddenLine xmlns="" xmlns:a14="http://schemas.microsoft.com/office/drawing/2010/main" w="9525">
                   <a:solidFill>
                     <a:srgbClr val="000000"/>
                   </a:solidFill>
@@ -2092,7 +2093,7 @@
             </a:ln>
             <a:extLst>
               <a:ext uri="{91240B29-F687-4f45-9708-019B960494DF}">
-                <a14:hiddenLine xmlns:a14="http://schemas.microsoft.com/office/drawing/2010/main" xmlns="" w="9525">
+                <a14:hiddenLine xmlns="" xmlns:a14="http://schemas.microsoft.com/office/drawing/2010/main" w="9525">
                   <a:solidFill>
                     <a:srgbClr val="000000"/>
                   </a:solidFill>
@@ -2182,7 +2183,7 @@
             </a:ln>
             <a:extLst>
               <a:ext uri="{91240B29-F687-4f45-9708-019B960494DF}">
-                <a14:hiddenLine xmlns:a14="http://schemas.microsoft.com/office/drawing/2010/main" xmlns="" w="9525">
+                <a14:hiddenLine xmlns="" xmlns:a14="http://schemas.microsoft.com/office/drawing/2010/main" w="9525">
                   <a:solidFill>
                     <a:srgbClr val="000000"/>
                   </a:solidFill>
@@ -2250,7 +2251,7 @@
             </a:ln>
             <a:extLst>
               <a:ext uri="{91240B29-F687-4f45-9708-019B960494DF}">
-                <a14:hiddenLine xmlns:a14="http://schemas.microsoft.com/office/drawing/2010/main" xmlns="" w="9525">
+                <a14:hiddenLine xmlns="" xmlns:a14="http://schemas.microsoft.com/office/drawing/2010/main" w="9525">
                   <a:solidFill>
                     <a:srgbClr val="000000"/>
                   </a:solidFill>
@@ -2340,7 +2341,7 @@
             </a:ln>
             <a:extLst>
               <a:ext uri="{91240B29-F687-4f45-9708-019B960494DF}">
-                <a14:hiddenLine xmlns:a14="http://schemas.microsoft.com/office/drawing/2010/main" xmlns="" w="9525">
+                <a14:hiddenLine xmlns="" xmlns:a14="http://schemas.microsoft.com/office/drawing/2010/main" w="9525">
                   <a:solidFill>
                     <a:srgbClr val="000000"/>
                   </a:solidFill>
@@ -2374,7 +2375,7 @@
             </a:ln>
             <a:extLst>
               <a:ext uri="{91240B29-F687-4f45-9708-019B960494DF}">
-                <a14:hiddenLine xmlns:a14="http://schemas.microsoft.com/office/drawing/2010/main" xmlns="" w="9525">
+                <a14:hiddenLine xmlns="" xmlns:a14="http://schemas.microsoft.com/office/drawing/2010/main" w="9525">
                   <a:solidFill>
                     <a:srgbClr val="000000"/>
                   </a:solidFill>
@@ -2464,7 +2465,7 @@
             </a:ln>
             <a:extLst>
               <a:ext uri="{91240B29-F687-4f45-9708-019B960494DF}">
-                <a14:hiddenLine xmlns:a14="http://schemas.microsoft.com/office/drawing/2010/main" xmlns="" w="9525">
+                <a14:hiddenLine xmlns="" xmlns:a14="http://schemas.microsoft.com/office/drawing/2010/main" w="9525">
                   <a:solidFill>
                     <a:srgbClr val="000000"/>
                   </a:solidFill>
@@ -2526,7 +2527,7 @@
             </a:ln>
             <a:extLst>
               <a:ext uri="{91240B29-F687-4f45-9708-019B960494DF}">
-                <a14:hiddenLine xmlns:a14="http://schemas.microsoft.com/office/drawing/2010/main" xmlns="" w="9525">
+                <a14:hiddenLine xmlns="" xmlns:a14="http://schemas.microsoft.com/office/drawing/2010/main" w="9525">
                   <a:solidFill>
                     <a:srgbClr val="000000"/>
                   </a:solidFill>
@@ -2588,7 +2589,7 @@
             </a:ln>
             <a:extLst>
               <a:ext uri="{91240B29-F687-4f45-9708-019B960494DF}">
-                <a14:hiddenLine xmlns:a14="http://schemas.microsoft.com/office/drawing/2010/main" xmlns="" w="9525">
+                <a14:hiddenLine xmlns="" xmlns:a14="http://schemas.microsoft.com/office/drawing/2010/main" w="9525">
                   <a:solidFill>
                     <a:srgbClr val="000000"/>
                   </a:solidFill>
@@ -2678,7 +2679,7 @@
             </a:ln>
             <a:extLst>
               <a:ext uri="{91240B29-F687-4f45-9708-019B960494DF}">
-                <a14:hiddenLine xmlns:a14="http://schemas.microsoft.com/office/drawing/2010/main" xmlns="" w="9525">
+                <a14:hiddenLine xmlns="" xmlns:a14="http://schemas.microsoft.com/office/drawing/2010/main" w="9525">
                   <a:solidFill>
                     <a:srgbClr val="000000"/>
                   </a:solidFill>
@@ -2746,7 +2747,7 @@
             </a:ln>
             <a:extLst>
               <a:ext uri="{91240B29-F687-4f45-9708-019B960494DF}">
-                <a14:hiddenLine xmlns:a14="http://schemas.microsoft.com/office/drawing/2010/main" xmlns="" w="9525">
+                <a14:hiddenLine xmlns="" xmlns:a14="http://schemas.microsoft.com/office/drawing/2010/main" w="9525">
                   <a:solidFill>
                     <a:srgbClr val="000000"/>
                   </a:solidFill>
@@ -2808,7 +2809,7 @@
             </a:ln>
             <a:extLst>
               <a:ext uri="{91240B29-F687-4f45-9708-019B960494DF}">
-                <a14:hiddenLine xmlns:a14="http://schemas.microsoft.com/office/drawing/2010/main" xmlns="" w="9525">
+                <a14:hiddenLine xmlns="" xmlns:a14="http://schemas.microsoft.com/office/drawing/2010/main" w="9525">
                   <a:solidFill>
                     <a:srgbClr val="000000"/>
                   </a:solidFill>
@@ -2898,7 +2899,7 @@
             </a:ln>
             <a:extLst>
               <a:ext uri="{91240B29-F687-4f45-9708-019B960494DF}">
-                <a14:hiddenLine xmlns:a14="http://schemas.microsoft.com/office/drawing/2010/main" xmlns="" w="9525">
+                <a14:hiddenLine xmlns="" xmlns:a14="http://schemas.microsoft.com/office/drawing/2010/main" w="9525">
                   <a:solidFill>
                     <a:srgbClr val="000000"/>
                   </a:solidFill>
@@ -2960,7 +2961,7 @@
             </a:ln>
             <a:extLst>
               <a:ext uri="{91240B29-F687-4f45-9708-019B960494DF}">
-                <a14:hiddenLine xmlns:a14="http://schemas.microsoft.com/office/drawing/2010/main" xmlns="" w="9525">
+                <a14:hiddenLine xmlns="" xmlns:a14="http://schemas.microsoft.com/office/drawing/2010/main" w="9525">
                   <a:solidFill>
                     <a:srgbClr val="000000"/>
                   </a:solidFill>
@@ -3050,7 +3051,7 @@
             </a:ln>
             <a:extLst>
               <a:ext uri="{91240B29-F687-4f45-9708-019B960494DF}">
-                <a14:hiddenLine xmlns:a14="http://schemas.microsoft.com/office/drawing/2010/main" xmlns="" w="9525">
+                <a14:hiddenLine xmlns="" xmlns:a14="http://schemas.microsoft.com/office/drawing/2010/main" w="9525">
                   <a:solidFill>
                     <a:srgbClr val="000000"/>
                   </a:solidFill>
@@ -3112,7 +3113,7 @@
             </a:ln>
             <a:extLst>
               <a:ext uri="{91240B29-F687-4f45-9708-019B960494DF}">
-                <a14:hiddenLine xmlns:a14="http://schemas.microsoft.com/office/drawing/2010/main" xmlns="" w="9525">
+                <a14:hiddenLine xmlns="" xmlns:a14="http://schemas.microsoft.com/office/drawing/2010/main" w="9525">
                   <a:solidFill>
                     <a:srgbClr val="000000"/>
                   </a:solidFill>
@@ -3202,7 +3203,7 @@
             </a:ln>
             <a:extLst>
               <a:ext uri="{91240B29-F687-4f45-9708-019B960494DF}">
-                <a14:hiddenLine xmlns:a14="http://schemas.microsoft.com/office/drawing/2010/main" xmlns="" w="9525">
+                <a14:hiddenLine xmlns="" xmlns:a14="http://schemas.microsoft.com/office/drawing/2010/main" w="9525">
                   <a:solidFill>
                     <a:srgbClr val="000000"/>
                   </a:solidFill>
@@ -3236,7 +3237,7 @@
             </a:ln>
             <a:extLst>
               <a:ext uri="{91240B29-F687-4f45-9708-019B960494DF}">
-                <a14:hiddenLine xmlns:a14="http://schemas.microsoft.com/office/drawing/2010/main" xmlns="" w="9525">
+                <a14:hiddenLine xmlns="" xmlns:a14="http://schemas.microsoft.com/office/drawing/2010/main" w="9525">
                   <a:solidFill>
                     <a:srgbClr val="000000"/>
                   </a:solidFill>
@@ -3301,7 +3302,7 @@
             </a:ln>
             <a:extLst>
               <a:ext uri="{91240B29-F687-4f45-9708-019B960494DF}">
-                <a14:hiddenLine xmlns:a14="http://schemas.microsoft.com/office/drawing/2010/main" xmlns="" w="9525">
+                <a14:hiddenLine xmlns="" xmlns:a14="http://schemas.microsoft.com/office/drawing/2010/main" w="9525">
                   <a:solidFill>
                     <a:srgbClr val="000000"/>
                   </a:solidFill>
@@ -3391,7 +3392,7 @@
             </a:ln>
             <a:extLst>
               <a:ext uri="{91240B29-F687-4f45-9708-019B960494DF}">
-                <a14:hiddenLine xmlns:a14="http://schemas.microsoft.com/office/drawing/2010/main" xmlns="" w="9525">
+                <a14:hiddenLine xmlns="" xmlns:a14="http://schemas.microsoft.com/office/drawing/2010/main" w="9525">
                   <a:solidFill>
                     <a:srgbClr val="000000"/>
                   </a:solidFill>
@@ -3453,7 +3454,7 @@
             </a:ln>
             <a:extLst>
               <a:ext uri="{91240B29-F687-4f45-9708-019B960494DF}">
-                <a14:hiddenLine xmlns:a14="http://schemas.microsoft.com/office/drawing/2010/main" xmlns="" w="9525">
+                <a14:hiddenLine xmlns="" xmlns:a14="http://schemas.microsoft.com/office/drawing/2010/main" w="9525">
                   <a:solidFill>
                     <a:srgbClr val="000000"/>
                   </a:solidFill>
@@ -3543,7 +3544,7 @@
             </a:ln>
             <a:extLst>
               <a:ext uri="{91240B29-F687-4f45-9708-019B960494DF}">
-                <a14:hiddenLine xmlns:a14="http://schemas.microsoft.com/office/drawing/2010/main" xmlns="" w="9525">
+                <a14:hiddenLine xmlns="" xmlns:a14="http://schemas.microsoft.com/office/drawing/2010/main" w="9525">
                   <a:solidFill>
                     <a:srgbClr val="000000"/>
                   </a:solidFill>
@@ -3633,7 +3634,7 @@
             </a:ln>
             <a:extLst>
               <a:ext uri="{91240B29-F687-4f45-9708-019B960494DF}">
-                <a14:hiddenLine xmlns:a14="http://schemas.microsoft.com/office/drawing/2010/main" xmlns="" w="9525">
+                <a14:hiddenLine xmlns="" xmlns:a14="http://schemas.microsoft.com/office/drawing/2010/main" w="9525">
                   <a:solidFill>
                     <a:srgbClr val="000000"/>
                   </a:solidFill>
@@ -3698,7 +3699,7 @@
             </a:ln>
             <a:extLst>
               <a:ext uri="{91240B29-F687-4f45-9708-019B960494DF}">
-                <a14:hiddenLine xmlns:a14="http://schemas.microsoft.com/office/drawing/2010/main" xmlns="" w="9525">
+                <a14:hiddenLine xmlns="" xmlns:a14="http://schemas.microsoft.com/office/drawing/2010/main" w="9525">
                   <a:solidFill>
                     <a:srgbClr val="000000"/>
                   </a:solidFill>
@@ -3760,7 +3761,7 @@
             </a:ln>
             <a:extLst>
               <a:ext uri="{91240B29-F687-4f45-9708-019B960494DF}">
-                <a14:hiddenLine xmlns:a14="http://schemas.microsoft.com/office/drawing/2010/main" xmlns="" w="9525">
+                <a14:hiddenLine xmlns="" xmlns:a14="http://schemas.microsoft.com/office/drawing/2010/main" w="9525">
                   <a:solidFill>
                     <a:srgbClr val="000000"/>
                   </a:solidFill>
@@ -3850,7 +3851,7 @@
             </a:ln>
             <a:extLst>
               <a:ext uri="{91240B29-F687-4f45-9708-019B960494DF}">
-                <a14:hiddenLine xmlns:a14="http://schemas.microsoft.com/office/drawing/2010/main" xmlns="" w="9525">
+                <a14:hiddenLine xmlns="" xmlns:a14="http://schemas.microsoft.com/office/drawing/2010/main" w="9525">
                   <a:solidFill>
                     <a:srgbClr val="000000"/>
                   </a:solidFill>
@@ -3940,7 +3941,7 @@
             </a:ln>
             <a:extLst>
               <a:ext uri="{91240B29-F687-4f45-9708-019B960494DF}">
-                <a14:hiddenLine xmlns:a14="http://schemas.microsoft.com/office/drawing/2010/main" xmlns="" w="9525">
+                <a14:hiddenLine xmlns="" xmlns:a14="http://schemas.microsoft.com/office/drawing/2010/main" w="9525">
                   <a:solidFill>
                     <a:srgbClr val="000000"/>
                   </a:solidFill>
@@ -4002,7 +4003,7 @@
             </a:ln>
             <a:extLst>
               <a:ext uri="{91240B29-F687-4f45-9708-019B960494DF}">
-                <a14:hiddenLine xmlns:a14="http://schemas.microsoft.com/office/drawing/2010/main" xmlns="" w="9525">
+                <a14:hiddenLine xmlns="" xmlns:a14="http://schemas.microsoft.com/office/drawing/2010/main" w="9525">
                   <a:solidFill>
                     <a:srgbClr val="000000"/>
                   </a:solidFill>
@@ -4122,7 +4123,7 @@
             </a:ln>
             <a:extLst>
               <a:ext uri="{91240B29-F687-4f45-9708-019B960494DF}">
-                <a14:hiddenLine xmlns:a14="http://schemas.microsoft.com/office/drawing/2010/main" xmlns="" w="9525">
+                <a14:hiddenLine xmlns="" xmlns:a14="http://schemas.microsoft.com/office/drawing/2010/main" w="9525">
                   <a:solidFill>
                     <a:srgbClr val="000000"/>
                   </a:solidFill>
@@ -4190,7 +4191,7 @@
             </a:ln>
             <a:extLst>
               <a:ext uri="{91240B29-F687-4f45-9708-019B960494DF}">
-                <a14:hiddenLine xmlns:a14="http://schemas.microsoft.com/office/drawing/2010/main" xmlns="" w="9525">
+                <a14:hiddenLine xmlns="" xmlns:a14="http://schemas.microsoft.com/office/drawing/2010/main" w="9525">
                   <a:solidFill>
                     <a:srgbClr val="000000"/>
                   </a:solidFill>
@@ -4280,7 +4281,7 @@
             </a:ln>
             <a:extLst>
               <a:ext uri="{91240B29-F687-4f45-9708-019B960494DF}">
-                <a14:hiddenLine xmlns:a14="http://schemas.microsoft.com/office/drawing/2010/main" xmlns="" w="9525">
+                <a14:hiddenLine xmlns="" xmlns:a14="http://schemas.microsoft.com/office/drawing/2010/main" w="9525">
                   <a:solidFill>
                     <a:srgbClr val="000000"/>
                   </a:solidFill>
@@ -4420,7 +4421,7 @@
           <a:p>
             <a:fld id="{5BCAD085-E8A6-8845-BD4E-CB4CCA059FC4}" type="datetimeFigureOut">
               <a:rPr lang="en-US" smtClean="0"/>
-              <a:t>8/2/2026</a:t>
+              <a:t>8/3/2026</a:t>
             </a:fld>
             <a:endParaRPr lang="en-US"/>
           </a:p>
@@ -4687,7 +4688,7 @@
           <a:p>
             <a:fld id="{5BCAD085-E8A6-8845-BD4E-CB4CCA059FC4}" type="datetimeFigureOut">
               <a:rPr lang="en-US" smtClean="0"/>
-              <a:t>8/2/2026</a:t>
+              <a:t>8/3/2026</a:t>
             </a:fld>
             <a:endParaRPr lang="en-US"/>
           </a:p>
@@ -4883,7 +4884,7 @@
           <a:p>
             <a:fld id="{5BCAD085-E8A6-8845-BD4E-CB4CCA059FC4}" type="datetimeFigureOut">
               <a:rPr lang="en-US" smtClean="0"/>
-              <a:t>8/2/2026</a:t>
+              <a:t>8/3/2026</a:t>
             </a:fld>
             <a:endParaRPr lang="en-US"/>
           </a:p>
@@ -5146,7 +5147,7 @@
           <a:p>
             <a:fld id="{5BCAD085-E8A6-8845-BD4E-CB4CCA059FC4}" type="datetimeFigureOut">
               <a:rPr lang="en-US" smtClean="0"/>
-              <a:t>8/2/2026</a:t>
+              <a:t>8/3/2026</a:t>
             </a:fld>
             <a:endParaRPr lang="en-US"/>
           </a:p>
@@ -5580,7 +5581,7 @@
           <a:p>
             <a:fld id="{5BCAD085-E8A6-8845-BD4E-CB4CCA059FC4}" type="datetimeFigureOut">
               <a:rPr lang="en-US" smtClean="0"/>
-              <a:t>8/2/2026</a:t>
+              <a:t>8/3/2026</a:t>
             </a:fld>
             <a:endParaRPr lang="en-US"/>
           </a:p>
@@ -6126,7 +6127,7 @@
           <a:p>
             <a:fld id="{5BCAD085-E8A6-8845-BD4E-CB4CCA059FC4}" type="datetimeFigureOut">
               <a:rPr lang="en-US" smtClean="0"/>
-              <a:t>8/2/2026</a:t>
+              <a:t>8/3/2026</a:t>
             </a:fld>
             <a:endParaRPr lang="en-US"/>
           </a:p>
@@ -6846,7 +6847,7 @@
           <a:p>
             <a:fld id="{5BCAD085-E8A6-8845-BD4E-CB4CCA059FC4}" type="datetimeFigureOut">
               <a:rPr lang="en-US" smtClean="0"/>
-              <a:t>8/2/2026</a:t>
+              <a:t>8/3/2026</a:t>
             </a:fld>
             <a:endParaRPr lang="en-US"/>
           </a:p>
@@ -7020,7 +7021,7 @@
           <a:p>
             <a:fld id="{5BCAD085-E8A6-8845-BD4E-CB4CCA059FC4}" type="datetimeFigureOut">
               <a:rPr lang="en-US" smtClean="0"/>
-              <a:t>8/2/2026</a:t>
+              <a:t>8/3/2026</a:t>
             </a:fld>
             <a:endParaRPr lang="en-US"/>
           </a:p>
@@ -7200,7 +7201,7 @@
           <a:p>
             <a:fld id="{5BCAD085-E8A6-8845-BD4E-CB4CCA059FC4}" type="datetimeFigureOut">
               <a:rPr lang="en-US" smtClean="0"/>
-              <a:t>8/2/2026</a:t>
+              <a:t>8/3/2026</a:t>
             </a:fld>
             <a:endParaRPr lang="en-US"/>
           </a:p>
@@ -7385,7 +7386,7 @@
           <a:p>
             <a:fld id="{5BCAD085-E8A6-8845-BD4E-CB4CCA059FC4}" type="datetimeFigureOut">
               <a:rPr lang="en-US" smtClean="0"/>
-              <a:t>8/2/2026</a:t>
+              <a:t>8/3/2026</a:t>
             </a:fld>
             <a:endParaRPr lang="en-US"/>
           </a:p>
@@ -7645,7 +7646,7 @@
           <a:p>
             <a:fld id="{5BCAD085-E8A6-8845-BD4E-CB4CCA059FC4}" type="datetimeFigureOut">
               <a:rPr lang="en-US" smtClean="0"/>
-              <a:t>8/2/2026</a:t>
+              <a:t>8/3/2026</a:t>
             </a:fld>
             <a:endParaRPr lang="en-US"/>
           </a:p>
@@ -7877,7 +7878,7 @@
           <a:p>
             <a:fld id="{5BCAD085-E8A6-8845-BD4E-CB4CCA059FC4}" type="datetimeFigureOut">
               <a:rPr lang="en-US" smtClean="0"/>
-              <a:t>8/2/2026</a:t>
+              <a:t>8/3/2026</a:t>
             </a:fld>
             <a:endParaRPr lang="en-US"/>
           </a:p>
@@ -8258,7 +8259,7 @@
           <a:p>
             <a:fld id="{5BCAD085-E8A6-8845-BD4E-CB4CCA059FC4}" type="datetimeFigureOut">
               <a:rPr lang="en-US" smtClean="0"/>
-              <a:t>8/2/2026</a:t>
+              <a:t>8/3/2026</a:t>
             </a:fld>
             <a:endParaRPr lang="en-US"/>
           </a:p>
@@ -8376,7 +8377,7 @@
           <a:p>
             <a:fld id="{5BCAD085-E8A6-8845-BD4E-CB4CCA059FC4}" type="datetimeFigureOut">
               <a:rPr lang="en-US" smtClean="0"/>
-              <a:t>8/2/2026</a:t>
+              <a:t>8/3/2026</a:t>
             </a:fld>
             <a:endParaRPr lang="en-US"/>
           </a:p>
@@ -8471,7 +8472,7 @@
           <a:p>
             <a:fld id="{5BCAD085-E8A6-8845-BD4E-CB4CCA059FC4}" type="datetimeFigureOut">
               <a:rPr lang="en-US" smtClean="0"/>
-              <a:t>8/2/2026</a:t>
+              <a:t>8/3/2026</a:t>
             </a:fld>
             <a:endParaRPr lang="en-US"/>
           </a:p>
@@ -8720,7 +8721,7 @@
           <a:p>
             <a:fld id="{5BCAD085-E8A6-8845-BD4E-CB4CCA059FC4}" type="datetimeFigureOut">
               <a:rPr lang="en-US" smtClean="0"/>
-              <a:t>8/2/2026</a:t>
+              <a:t>8/3/2026</a:t>
             </a:fld>
             <a:endParaRPr lang="en-US"/>
           </a:p>
@@ -8972,7 +8973,7 @@
           <a:p>
             <a:fld id="{5BCAD085-E8A6-8845-BD4E-CB4CCA059FC4}" type="datetimeFigureOut">
               <a:rPr lang="en-US" smtClean="0"/>
-              <a:t>8/2/2026</a:t>
+              <a:t>8/3/2026</a:t>
             </a:fld>
             <a:endParaRPr lang="en-US"/>
           </a:p>
@@ -9095,7 +9096,7 @@
           <a:noFill/>
           <a:extLst>
             <a:ext uri="{909E8E84-426E-40dd-AFC4-6F175D3DCCD1}">
-              <a14:hiddenFill xmlns:a14="http://schemas.microsoft.com/office/drawing/2010/main" xmlns="">
+              <a14:hiddenFill xmlns="" xmlns:a14="http://schemas.microsoft.com/office/drawing/2010/main">
                 <a:solidFill>
                   <a:srgbClr val="FFFFFF"/>
                 </a:solidFill>
@@ -9169,7 +9170,7 @@
               </a:ln>
               <a:extLst>
                 <a:ext uri="{91240B29-F687-4f45-9708-019B960494DF}">
-                  <a14:hiddenLine xmlns:a14="http://schemas.microsoft.com/office/drawing/2010/main" xmlns="" w="9525">
+                  <a14:hiddenLine xmlns="" xmlns:a14="http://schemas.microsoft.com/office/drawing/2010/main" w="9525">
                     <a:solidFill>
                       <a:srgbClr val="000000"/>
                     </a:solidFill>
@@ -9259,7 +9260,7 @@
               </a:ln>
               <a:extLst>
                 <a:ext uri="{91240B29-F687-4f45-9708-019B960494DF}">
-                  <a14:hiddenLine xmlns:a14="http://schemas.microsoft.com/office/drawing/2010/main" xmlns="" w="9525">
+                  <a14:hiddenLine xmlns="" xmlns:a14="http://schemas.microsoft.com/office/drawing/2010/main" w="9525">
                     <a:solidFill>
                       <a:srgbClr val="000000"/>
                     </a:solidFill>
@@ -9349,7 +9350,7 @@
               </a:ln>
               <a:extLst>
                 <a:ext uri="{91240B29-F687-4f45-9708-019B960494DF}">
-                  <a14:hiddenLine xmlns:a14="http://schemas.microsoft.com/office/drawing/2010/main" xmlns="" w="9525">
+                  <a14:hiddenLine xmlns="" xmlns:a14="http://schemas.microsoft.com/office/drawing/2010/main" w="9525">
                     <a:solidFill>
                       <a:srgbClr val="000000"/>
                     </a:solidFill>
@@ -9411,7 +9412,7 @@
               </a:ln>
               <a:extLst>
                 <a:ext uri="{91240B29-F687-4f45-9708-019B960494DF}">
-                  <a14:hiddenLine xmlns:a14="http://schemas.microsoft.com/office/drawing/2010/main" xmlns="" w="9525">
+                  <a14:hiddenLine xmlns="" xmlns:a14="http://schemas.microsoft.com/office/drawing/2010/main" w="9525">
                     <a:solidFill>
                       <a:srgbClr val="000000"/>
                     </a:solidFill>
@@ -9501,7 +9502,7 @@
               </a:ln>
               <a:extLst>
                 <a:ext uri="{91240B29-F687-4f45-9708-019B960494DF}">
-                  <a14:hiddenLine xmlns:a14="http://schemas.microsoft.com/office/drawing/2010/main" xmlns="" w="9525">
+                  <a14:hiddenLine xmlns="" xmlns:a14="http://schemas.microsoft.com/office/drawing/2010/main" w="9525">
                     <a:solidFill>
                       <a:srgbClr val="000000"/>
                     </a:solidFill>
@@ -9563,7 +9564,7 @@
               </a:ln>
               <a:extLst>
                 <a:ext uri="{91240B29-F687-4f45-9708-019B960494DF}">
-                  <a14:hiddenLine xmlns:a14="http://schemas.microsoft.com/office/drawing/2010/main" xmlns="" w="9525">
+                  <a14:hiddenLine xmlns="" xmlns:a14="http://schemas.microsoft.com/office/drawing/2010/main" w="9525">
                     <a:solidFill>
                       <a:srgbClr val="000000"/>
                     </a:solidFill>
@@ -9625,7 +9626,7 @@
               </a:ln>
               <a:extLst>
                 <a:ext uri="{91240B29-F687-4f45-9708-019B960494DF}">
-                  <a14:hiddenLine xmlns:a14="http://schemas.microsoft.com/office/drawing/2010/main" xmlns="" w="9525">
+                  <a14:hiddenLine xmlns="" xmlns:a14="http://schemas.microsoft.com/office/drawing/2010/main" w="9525">
                     <a:solidFill>
                       <a:srgbClr val="000000"/>
                     </a:solidFill>
@@ -9715,7 +9716,7 @@
               </a:ln>
               <a:extLst>
                 <a:ext uri="{91240B29-F687-4f45-9708-019B960494DF}">
-                  <a14:hiddenLine xmlns:a14="http://schemas.microsoft.com/office/drawing/2010/main" xmlns="" w="9525">
+                  <a14:hiddenLine xmlns="" xmlns:a14="http://schemas.microsoft.com/office/drawing/2010/main" w="9525">
                     <a:solidFill>
                       <a:srgbClr val="000000"/>
                     </a:solidFill>
@@ -9805,7 +9806,7 @@
               </a:ln>
               <a:extLst>
                 <a:ext uri="{91240B29-F687-4f45-9708-019B960494DF}">
-                  <a14:hiddenLine xmlns:a14="http://schemas.microsoft.com/office/drawing/2010/main" xmlns="" w="9525">
+                  <a14:hiddenLine xmlns="" xmlns:a14="http://schemas.microsoft.com/office/drawing/2010/main" w="9525">
                     <a:solidFill>
                       <a:srgbClr val="000000"/>
                     </a:solidFill>
@@ -9867,7 +9868,7 @@
               </a:ln>
               <a:extLst>
                 <a:ext uri="{91240B29-F687-4f45-9708-019B960494DF}">
-                  <a14:hiddenLine xmlns:a14="http://schemas.microsoft.com/office/drawing/2010/main" xmlns="" w="9525">
+                  <a14:hiddenLine xmlns="" xmlns:a14="http://schemas.microsoft.com/office/drawing/2010/main" w="9525">
                     <a:solidFill>
                       <a:srgbClr val="000000"/>
                     </a:solidFill>
@@ -9977,7 +9978,7 @@
               </a:ln>
               <a:extLst>
                 <a:ext uri="{91240B29-F687-4f45-9708-019B960494DF}">
-                  <a14:hiddenLine xmlns:a14="http://schemas.microsoft.com/office/drawing/2010/main" xmlns="" w="9525">
+                  <a14:hiddenLine xmlns="" xmlns:a14="http://schemas.microsoft.com/office/drawing/2010/main" w="9525">
                     <a:solidFill>
                       <a:srgbClr val="000000"/>
                     </a:solidFill>
@@ -10061,7 +10062,7 @@
               </a:ln>
               <a:extLst>
                 <a:ext uri="{91240B29-F687-4f45-9708-019B960494DF}">
-                  <a14:hiddenLine xmlns:a14="http://schemas.microsoft.com/office/drawing/2010/main" xmlns="" w="9525">
+                  <a14:hiddenLine xmlns="" xmlns:a14="http://schemas.microsoft.com/office/drawing/2010/main" w="9525">
                     <a:solidFill>
                       <a:srgbClr val="000000"/>
                     </a:solidFill>
@@ -10123,7 +10124,7 @@
               </a:ln>
               <a:extLst>
                 <a:ext uri="{91240B29-F687-4f45-9708-019B960494DF}">
-                  <a14:hiddenLine xmlns:a14="http://schemas.microsoft.com/office/drawing/2010/main" xmlns="" w="9525">
+                  <a14:hiddenLine xmlns="" xmlns:a14="http://schemas.microsoft.com/office/drawing/2010/main" w="9525">
                     <a:solidFill>
                       <a:srgbClr val="000000"/>
                     </a:solidFill>
@@ -10185,7 +10186,7 @@
               </a:ln>
               <a:extLst>
                 <a:ext uri="{91240B29-F687-4f45-9708-019B960494DF}">
-                  <a14:hiddenLine xmlns:a14="http://schemas.microsoft.com/office/drawing/2010/main" xmlns="" w="9525">
+                  <a14:hiddenLine xmlns="" xmlns:a14="http://schemas.microsoft.com/office/drawing/2010/main" w="9525">
                     <a:solidFill>
                       <a:srgbClr val="000000"/>
                     </a:solidFill>
@@ -10275,7 +10276,7 @@
               </a:ln>
               <a:extLst>
                 <a:ext uri="{91240B29-F687-4f45-9708-019B960494DF}">
-                  <a14:hiddenLine xmlns:a14="http://schemas.microsoft.com/office/drawing/2010/main" xmlns="" w="9525">
+                  <a14:hiddenLine xmlns="" xmlns:a14="http://schemas.microsoft.com/office/drawing/2010/main" w="9525">
                     <a:solidFill>
                       <a:srgbClr val="000000"/>
                     </a:solidFill>
@@ -10309,7 +10310,7 @@
               </a:ln>
               <a:extLst>
                 <a:ext uri="{91240B29-F687-4f45-9708-019B960494DF}">
-                  <a14:hiddenLine xmlns:a14="http://schemas.microsoft.com/office/drawing/2010/main" xmlns="" w="9525">
+                  <a14:hiddenLine xmlns="" xmlns:a14="http://schemas.microsoft.com/office/drawing/2010/main" w="9525">
                     <a:solidFill>
                       <a:srgbClr val="000000"/>
                     </a:solidFill>
@@ -10374,7 +10375,7 @@
               </a:ln>
               <a:extLst>
                 <a:ext uri="{91240B29-F687-4f45-9708-019B960494DF}">
-                  <a14:hiddenLine xmlns:a14="http://schemas.microsoft.com/office/drawing/2010/main" xmlns="" w="9525">
+                  <a14:hiddenLine xmlns="" xmlns:a14="http://schemas.microsoft.com/office/drawing/2010/main" w="9525">
                     <a:solidFill>
                       <a:srgbClr val="000000"/>
                     </a:solidFill>
@@ -10464,7 +10465,7 @@
               </a:ln>
               <a:extLst>
                 <a:ext uri="{91240B29-F687-4f45-9708-019B960494DF}">
-                  <a14:hiddenLine xmlns:a14="http://schemas.microsoft.com/office/drawing/2010/main" xmlns="" w="9525">
+                  <a14:hiddenLine xmlns="" xmlns:a14="http://schemas.microsoft.com/office/drawing/2010/main" w="9525">
                     <a:solidFill>
                       <a:srgbClr val="000000"/>
                     </a:solidFill>
@@ -10526,7 +10527,7 @@
               </a:ln>
               <a:extLst>
                 <a:ext uri="{91240B29-F687-4f45-9708-019B960494DF}">
-                  <a14:hiddenLine xmlns:a14="http://schemas.microsoft.com/office/drawing/2010/main" xmlns="" w="9525">
+                  <a14:hiddenLine xmlns="" xmlns:a14="http://schemas.microsoft.com/office/drawing/2010/main" w="9525">
                     <a:solidFill>
                       <a:srgbClr val="000000"/>
                     </a:solidFill>
@@ -10616,7 +10617,7 @@
               </a:ln>
               <a:extLst>
                 <a:ext uri="{91240B29-F687-4f45-9708-019B960494DF}">
-                  <a14:hiddenLine xmlns:a14="http://schemas.microsoft.com/office/drawing/2010/main" xmlns="" w="9525">
+                  <a14:hiddenLine xmlns="" xmlns:a14="http://schemas.microsoft.com/office/drawing/2010/main" w="9525">
                     <a:solidFill>
                       <a:srgbClr val="000000"/>
                     </a:solidFill>
@@ -10681,7 +10682,7 @@
               </a:ln>
               <a:extLst>
                 <a:ext uri="{91240B29-F687-4f45-9708-019B960494DF}">
-                  <a14:hiddenLine xmlns:a14="http://schemas.microsoft.com/office/drawing/2010/main" xmlns="" w="9525">
+                  <a14:hiddenLine xmlns="" xmlns:a14="http://schemas.microsoft.com/office/drawing/2010/main" w="9525">
                     <a:solidFill>
                       <a:srgbClr val="000000"/>
                     </a:solidFill>
@@ -10743,7 +10744,7 @@
               </a:ln>
               <a:extLst>
                 <a:ext uri="{91240B29-F687-4f45-9708-019B960494DF}">
-                  <a14:hiddenLine xmlns:a14="http://schemas.microsoft.com/office/drawing/2010/main" xmlns="" w="9525">
+                  <a14:hiddenLine xmlns="" xmlns:a14="http://schemas.microsoft.com/office/drawing/2010/main" w="9525">
                     <a:solidFill>
                       <a:srgbClr val="000000"/>
                     </a:solidFill>
@@ -10833,7 +10834,7 @@
               </a:ln>
               <a:extLst>
                 <a:ext uri="{91240B29-F687-4f45-9708-019B960494DF}">
-                  <a14:hiddenLine xmlns:a14="http://schemas.microsoft.com/office/drawing/2010/main" xmlns="" w="9525">
+                  <a14:hiddenLine xmlns="" xmlns:a14="http://schemas.microsoft.com/office/drawing/2010/main" w="9525">
                     <a:solidFill>
                       <a:srgbClr val="000000"/>
                     </a:solidFill>
@@ -10923,7 +10924,7 @@
               </a:ln>
               <a:extLst>
                 <a:ext uri="{91240B29-F687-4f45-9708-019B960494DF}">
-                  <a14:hiddenLine xmlns:a14="http://schemas.microsoft.com/office/drawing/2010/main" xmlns="" w="9525">
+                  <a14:hiddenLine xmlns="" xmlns:a14="http://schemas.microsoft.com/office/drawing/2010/main" w="9525">
                     <a:solidFill>
                       <a:srgbClr val="000000"/>
                     </a:solidFill>
@@ -10988,7 +10989,7 @@
               </a:ln>
               <a:extLst>
                 <a:ext uri="{91240B29-F687-4f45-9708-019B960494DF}">
-                  <a14:hiddenLine xmlns:a14="http://schemas.microsoft.com/office/drawing/2010/main" xmlns="" w="9525">
+                  <a14:hiddenLine xmlns="" xmlns:a14="http://schemas.microsoft.com/office/drawing/2010/main" w="9525">
                     <a:solidFill>
                       <a:srgbClr val="000000"/>
                     </a:solidFill>
@@ -11108,7 +11109,7 @@
               </a:ln>
               <a:extLst>
                 <a:ext uri="{91240B29-F687-4f45-9708-019B960494DF}">
-                  <a14:hiddenLine xmlns:a14="http://schemas.microsoft.com/office/drawing/2010/main" xmlns="" w="9525">
+                  <a14:hiddenLine xmlns="" xmlns:a14="http://schemas.microsoft.com/office/drawing/2010/main" w="9525">
                     <a:solidFill>
                       <a:srgbClr val="000000"/>
                     </a:solidFill>
@@ -11206,7 +11207,7 @@
               </a:ln>
               <a:extLst>
                 <a:ext uri="{91240B29-F687-4f45-9708-019B960494DF}">
-                  <a14:hiddenLine xmlns:a14="http://schemas.microsoft.com/office/drawing/2010/main" xmlns="" w="9525">
+                  <a14:hiddenLine xmlns="" xmlns:a14="http://schemas.microsoft.com/office/drawing/2010/main" w="9525">
                     <a:solidFill>
                       <a:srgbClr val="000000"/>
                     </a:solidFill>
@@ -11321,7 +11322,7 @@
               </a:ln>
               <a:extLst>
                 <a:ext uri="{91240B29-F687-4f45-9708-019B960494DF}">
-                  <a14:hiddenLine xmlns:a14="http://schemas.microsoft.com/office/drawing/2010/main" xmlns="" w="9525">
+                  <a14:hiddenLine xmlns="" xmlns:a14="http://schemas.microsoft.com/office/drawing/2010/main" w="9525">
                     <a:solidFill>
                       <a:srgbClr val="000000"/>
                     </a:solidFill>
@@ -11411,7 +11412,7 @@
               </a:ln>
               <a:extLst>
                 <a:ext uri="{91240B29-F687-4f45-9708-019B960494DF}">
-                  <a14:hiddenLine xmlns:a14="http://schemas.microsoft.com/office/drawing/2010/main" xmlns="" w="9525">
+                  <a14:hiddenLine xmlns="" xmlns:a14="http://schemas.microsoft.com/office/drawing/2010/main" w="9525">
                     <a:solidFill>
                       <a:srgbClr val="000000"/>
                     </a:solidFill>
@@ -11476,7 +11477,7 @@
               </a:ln>
               <a:extLst>
                 <a:ext uri="{91240B29-F687-4f45-9708-019B960494DF}">
-                  <a14:hiddenLine xmlns:a14="http://schemas.microsoft.com/office/drawing/2010/main" xmlns="" w="9525">
+                  <a14:hiddenLine xmlns="" xmlns:a14="http://schemas.microsoft.com/office/drawing/2010/main" w="9525">
                     <a:solidFill>
                       <a:srgbClr val="000000"/>
                     </a:solidFill>
@@ -11566,7 +11567,7 @@
               </a:ln>
               <a:extLst>
                 <a:ext uri="{91240B29-F687-4f45-9708-019B960494DF}">
-                  <a14:hiddenLine xmlns:a14="http://schemas.microsoft.com/office/drawing/2010/main" xmlns="" w="9525">
+                  <a14:hiddenLine xmlns="" xmlns:a14="http://schemas.microsoft.com/office/drawing/2010/main" w="9525">
                     <a:solidFill>
                       <a:srgbClr val="000000"/>
                     </a:solidFill>
@@ -11634,7 +11635,7 @@
               </a:ln>
               <a:extLst>
                 <a:ext uri="{91240B29-F687-4f45-9708-019B960494DF}">
-                  <a14:hiddenLine xmlns:a14="http://schemas.microsoft.com/office/drawing/2010/main" xmlns="" w="9525">
+                  <a14:hiddenLine xmlns="" xmlns:a14="http://schemas.microsoft.com/office/drawing/2010/main" w="9525">
                     <a:solidFill>
                       <a:srgbClr val="000000"/>
                     </a:solidFill>
@@ -11724,7 +11725,7 @@
               </a:ln>
               <a:extLst>
                 <a:ext uri="{91240B29-F687-4f45-9708-019B960494DF}">
-                  <a14:hiddenLine xmlns:a14="http://schemas.microsoft.com/office/drawing/2010/main" xmlns="" w="9525">
+                  <a14:hiddenLine xmlns="" xmlns:a14="http://schemas.microsoft.com/office/drawing/2010/main" w="9525">
                     <a:solidFill>
                       <a:srgbClr val="000000"/>
                     </a:solidFill>
@@ -11792,7 +11793,7 @@
               </a:ln>
               <a:extLst>
                 <a:ext uri="{91240B29-F687-4f45-9708-019B960494DF}">
-                  <a14:hiddenLine xmlns:a14="http://schemas.microsoft.com/office/drawing/2010/main" xmlns="" w="9525">
+                  <a14:hiddenLine xmlns="" xmlns:a14="http://schemas.microsoft.com/office/drawing/2010/main" w="9525">
                     <a:solidFill>
                       <a:srgbClr val="000000"/>
                     </a:solidFill>
@@ -11882,7 +11883,7 @@
               </a:ln>
               <a:extLst>
                 <a:ext uri="{91240B29-F687-4f45-9708-019B960494DF}">
-                  <a14:hiddenLine xmlns:a14="http://schemas.microsoft.com/office/drawing/2010/main" xmlns="" w="9525">
+                  <a14:hiddenLine xmlns="" xmlns:a14="http://schemas.microsoft.com/office/drawing/2010/main" w="9525">
                     <a:solidFill>
                       <a:srgbClr val="000000"/>
                     </a:solidFill>
@@ -11916,7 +11917,7 @@
               </a:ln>
               <a:extLst>
                 <a:ext uri="{91240B29-F687-4f45-9708-019B960494DF}">
-                  <a14:hiddenLine xmlns:a14="http://schemas.microsoft.com/office/drawing/2010/main" xmlns="" w="9525">
+                  <a14:hiddenLine xmlns="" xmlns:a14="http://schemas.microsoft.com/office/drawing/2010/main" w="9525">
                     <a:solidFill>
                       <a:srgbClr val="000000"/>
                     </a:solidFill>
@@ -12056,7 +12057,7 @@
           <a:p>
             <a:fld id="{5BCAD085-E8A6-8845-BD4E-CB4CCA059FC4}" type="datetimeFigureOut">
               <a:rPr lang="en-US" smtClean="0"/>
-              <a:t>8/2/2026</a:t>
+              <a:t>8/3/2026</a:t>
             </a:fld>
             <a:endParaRPr lang="en-US"/>
           </a:p>
@@ -12660,7 +12661,12 @@
             <p:ph idx="1"/>
           </p:nvPr>
         </p:nvSpPr>
-        <p:spPr/>
+        <p:spPr>
+          <a:xfrm>
+            <a:off x="558800" y="1727200"/>
+            <a:ext cx="7726759" cy="4064001"/>
+          </a:xfrm>
+        </p:spPr>
         <p:txBody>
           <a:bodyPr/>
           <a:lstStyle/>
@@ -12742,8 +12748,8 @@
         </p:blipFill>
         <p:spPr>
           <a:xfrm>
-            <a:off x="1442084" y="730885"/>
-            <a:ext cx="6472555" cy="1687196"/>
+            <a:off x="1442084" y="730884"/>
+            <a:ext cx="6472555" cy="2469515"/>
           </a:xfrm>
           <a:prstGeom prst="rect">
             <a:avLst/>
@@ -12805,8 +12811,8 @@
         </p:blipFill>
         <p:spPr>
           <a:xfrm>
-            <a:off x="1442083" y="2943962"/>
-            <a:ext cx="6472555" cy="1317625"/>
+            <a:off x="1442084" y="3942080"/>
+            <a:ext cx="6472555" cy="2448560"/>
           </a:xfrm>
           <a:prstGeom prst="rect">
             <a:avLst/>
@@ -12821,7 +12827,7 @@
         </p:nvSpPr>
         <p:spPr>
           <a:xfrm>
-            <a:off x="1340115" y="2523631"/>
+            <a:off x="1340115" y="3295277"/>
             <a:ext cx="2042995" cy="461665"/>
           </a:xfrm>
           <a:prstGeom prst="rect">
@@ -12841,90 +12847,6 @@
               <a:rPr lang="en-IN" dirty="0"/>
               <a:t>Storage bucket</a:t>
             </a:r>
-            <a:endParaRPr lang="en-IN" dirty="0"/>
-          </a:p>
-        </p:txBody>
-      </p:sp>
-      <p:pic>
-        <p:nvPicPr>
-          <p:cNvPr id="9" name="Picture 8"/>
-          <p:cNvPicPr/>
-          <p:nvPr/>
-        </p:nvPicPr>
-        <p:blipFill rotWithShape="1">
-          <a:blip r:embed="rId4"/>
-          <a:srcRect b="17071"/>
-          <a:stretch/>
-        </p:blipFill>
-        <p:spPr bwMode="auto">
-          <a:xfrm>
-            <a:off x="1442084" y="4909509"/>
-            <a:ext cx="6472554" cy="1857685"/>
-          </a:xfrm>
-          <a:prstGeom prst="rect">
-            <a:avLst/>
-          </a:prstGeom>
-          <a:ln>
-            <a:noFill/>
-          </a:ln>
-          <a:extLst>
-            <a:ext uri="{53640926-AAD7-44D8-BBD7-CCE9431645EC}">
-              <a14:shadowObscured xmlns:a14="http://schemas.microsoft.com/office/drawing/2010/main"/>
-            </a:ext>
-          </a:extLst>
-        </p:spPr>
-      </p:pic>
-      <p:sp>
-        <p:nvSpPr>
-          <p:cNvPr id="10" name="Rectangle 9"/>
-          <p:cNvSpPr/>
-          <p:nvPr/>
-        </p:nvSpPr>
-        <p:spPr>
-          <a:xfrm>
-            <a:off x="1044741" y="4396856"/>
-            <a:ext cx="2807179" cy="461665"/>
-          </a:xfrm>
-          <a:prstGeom prst="rect">
-            <a:avLst/>
-          </a:prstGeom>
-        </p:spPr>
-        <p:txBody>
-          <a:bodyPr wrap="none">
-            <a:spAutoFit/>
-          </a:bodyPr>
-          <a:lstStyle/>
-          <a:p>
-            <a:pPr lvl="0">
-              <a:spcAft>
-                <a:spcPts val="1000"/>
-              </a:spcAft>
-              <a:buSzPts val="1000"/>
-              <a:tabLst>
-                <a:tab pos="457200" algn="l"/>
-              </a:tabLst>
-            </a:pPr>
-            <a:r>
-              <a:rPr lang="en-US" dirty="0" smtClean="0">
-                <a:latin typeface="Times New Roman" panose="02020603050405020304" pitchFamily="18" charset="0"/>
-                <a:ea typeface="Calibri" panose="020F0502020204030204" pitchFamily="34" charset="0"/>
-                <a:cs typeface="Times New Roman" panose="02020603050405020304" pitchFamily="18" charset="0"/>
-              </a:rPr>
-              <a:t>      </a:t>
-            </a:r>
-            <a:r>
-              <a:rPr lang="en-US" sz="2400" dirty="0" err="1"/>
-              <a:t>BigQuery</a:t>
-            </a:r>
-            <a:r>
-              <a:rPr lang="en-US" sz="2400" dirty="0"/>
-              <a:t> </a:t>
-            </a:r>
-            <a:r>
-              <a:rPr lang="en-US" sz="2400" dirty="0"/>
-              <a:t>dataset </a:t>
-            </a:r>
-            <a:endParaRPr lang="en-IN" sz="2400" dirty="0"/>
           </a:p>
         </p:txBody>
       </p:sp>
@@ -12967,8 +12889,8 @@
         </p:blipFill>
         <p:spPr>
           <a:xfrm>
-            <a:off x="1431924" y="767080"/>
-            <a:ext cx="6533515" cy="1264920"/>
+            <a:off x="1320164" y="4094480"/>
+            <a:ext cx="6533515" cy="2387600"/>
           </a:xfrm>
           <a:prstGeom prst="rect">
             <a:avLst/>
@@ -12983,7 +12905,7 @@
         </p:nvSpPr>
         <p:spPr>
           <a:xfrm>
-            <a:off x="1320164" y="249803"/>
+            <a:off x="1320164" y="3497431"/>
             <a:ext cx="4572000" cy="738664"/>
           </a:xfrm>
           <a:prstGeom prst="rect">
@@ -13011,6 +12933,163 @@
             <a:br>
               <a:rPr lang="en-IN" dirty="0"/>
             </a:br>
+            <a:endParaRPr lang="en-IN" dirty="0"/>
+          </a:p>
+        </p:txBody>
+      </p:sp>
+      <p:pic>
+        <p:nvPicPr>
+          <p:cNvPr id="8" name="Picture 7"/>
+          <p:cNvPicPr/>
+          <p:nvPr/>
+        </p:nvPicPr>
+        <p:blipFill rotWithShape="1">
+          <a:blip r:embed="rId3"/>
+          <a:srcRect b="17071"/>
+          <a:stretch/>
+        </p:blipFill>
+        <p:spPr bwMode="auto">
+          <a:xfrm>
+            <a:off x="1381125" y="1027640"/>
+            <a:ext cx="6472554" cy="2243880"/>
+          </a:xfrm>
+          <a:prstGeom prst="rect">
+            <a:avLst/>
+          </a:prstGeom>
+          <a:ln>
+            <a:noFill/>
+          </a:ln>
+          <a:extLst>
+            <a:ext uri="{53640926-AAD7-44D8-BBD7-CCE9431645EC}">
+              <a14:shadowObscured xmlns:a14="http://schemas.microsoft.com/office/drawing/2010/main"/>
+            </a:ext>
+          </a:extLst>
+        </p:spPr>
+      </p:pic>
+      <p:sp>
+        <p:nvSpPr>
+          <p:cNvPr id="2" name="Rectangle 1"/>
+          <p:cNvSpPr/>
+          <p:nvPr/>
+        </p:nvSpPr>
+        <p:spPr>
+          <a:xfrm>
+            <a:off x="1228724" y="480291"/>
+            <a:ext cx="2476960" cy="461665"/>
+          </a:xfrm>
+          <a:prstGeom prst="rect">
+            <a:avLst/>
+          </a:prstGeom>
+        </p:spPr>
+        <p:txBody>
+          <a:bodyPr wrap="none">
+            <a:spAutoFit/>
+          </a:bodyPr>
+          <a:lstStyle/>
+          <a:p>
+            <a:r>
+              <a:rPr lang="en-US" dirty="0">
+                <a:latin typeface="Times New Roman" panose="02020603050405020304" pitchFamily="18" charset="0"/>
+                <a:ea typeface="Calibri" panose="020F0502020204030204" pitchFamily="34" charset="0"/>
+                <a:cs typeface="Times New Roman" panose="02020603050405020304" pitchFamily="18" charset="0"/>
+              </a:rPr>
+              <a:t> </a:t>
+            </a:r>
+            <a:r>
+              <a:rPr lang="en-US" sz="2400" dirty="0" err="1"/>
+              <a:t>BigQuery</a:t>
+            </a:r>
+            <a:r>
+              <a:rPr lang="en-US" dirty="0"/>
+              <a:t> </a:t>
+            </a:r>
+            <a:r>
+              <a:rPr lang="en-US" sz="2400" dirty="0"/>
+              <a:t>dataset</a:t>
+            </a:r>
+            <a:r>
+              <a:rPr lang="en-US" dirty="0"/>
+              <a:t> </a:t>
+            </a:r>
+            <a:endParaRPr lang="en-IN" dirty="0"/>
+          </a:p>
+        </p:txBody>
+      </p:sp>
+    </p:spTree>
+  </p:cSld>
+  <p:clrMapOvr>
+    <a:masterClrMapping/>
+  </p:clrMapOvr>
+</p:sld>
+</file>
+
+<file path=ppt/slides/slide13.xml><?xml version="1.0" encoding="utf-8"?>
+<p:sld xmlns:a="http://schemas.openxmlformats.org/drawingml/2006/main" xmlns:r="http://schemas.openxmlformats.org/officeDocument/2006/relationships" xmlns:p="http://schemas.openxmlformats.org/presentationml/2006/main">
+  <p:cSld>
+    <p:spTree>
+      <p:nvGrpSpPr>
+        <p:cNvPr id="1" name=""/>
+        <p:cNvGrpSpPr/>
+        <p:nvPr/>
+      </p:nvGrpSpPr>
+      <p:grpSpPr>
+        <a:xfrm>
+          <a:off x="0" y="0"/>
+          <a:ext cx="0" cy="0"/>
+          <a:chOff x="0" y="0"/>
+          <a:chExt cx="0" cy="0"/>
+        </a:xfrm>
+      </p:grpSpPr>
+      <p:pic>
+        <p:nvPicPr>
+          <p:cNvPr id="4" name="Picture 3"/>
+          <p:cNvPicPr/>
+          <p:nvPr/>
+        </p:nvPicPr>
+        <p:blipFill>
+          <a:blip r:embed="rId2"/>
+          <a:stretch>
+            <a:fillRect/>
+          </a:stretch>
+        </p:blipFill>
+        <p:spPr>
+          <a:xfrm>
+            <a:off x="1360805" y="4150360"/>
+            <a:ext cx="6631478" cy="2250440"/>
+          </a:xfrm>
+          <a:prstGeom prst="rect">
+            <a:avLst/>
+          </a:prstGeom>
+        </p:spPr>
+      </p:pic>
+      <p:sp>
+        <p:nvSpPr>
+          <p:cNvPr id="5" name="Rectangle 4"/>
+          <p:cNvSpPr/>
+          <p:nvPr/>
+        </p:nvSpPr>
+        <p:spPr>
+          <a:xfrm>
+            <a:off x="1275888" y="3523288"/>
+            <a:ext cx="3199274" cy="461665"/>
+          </a:xfrm>
+          <a:prstGeom prst="rect">
+            <a:avLst/>
+          </a:prstGeom>
+        </p:spPr>
+        <p:txBody>
+          <a:bodyPr wrap="none">
+            <a:spAutoFit/>
+          </a:bodyPr>
+          <a:lstStyle/>
+          <a:p>
+            <a:pPr>
+              <a:defRPr sz="2400"/>
+            </a:pPr>
+            <a:r>
+              <a:rPr lang="en-IN" dirty="0"/>
+              <a:t>API Validation Successful</a:t>
+            </a:r>
             <a:endParaRPr lang="en-IN" dirty="0"/>
           </a:p>
         </p:txBody>
@@ -13029,7 +13108,7 @@
         </p:blipFill>
         <p:spPr>
           <a:xfrm>
-            <a:off x="1431924" y="2745878"/>
+            <a:off x="1347008" y="1211898"/>
             <a:ext cx="6645275" cy="2145983"/>
           </a:xfrm>
           <a:prstGeom prst="rect">
@@ -13045,15 +13124,15 @@
         </p:nvSpPr>
         <p:spPr>
           <a:xfrm>
-            <a:off x="1320164" y="2284213"/>
-            <a:ext cx="2011513" cy="461665"/>
+            <a:off x="1319522" y="680453"/>
+            <a:ext cx="2764798" cy="461665"/>
           </a:xfrm>
           <a:prstGeom prst="rect">
             <a:avLst/>
           </a:prstGeom>
         </p:spPr>
         <p:txBody>
-          <a:bodyPr wrap="none">
+          <a:bodyPr wrap="square">
             <a:spAutoFit/>
           </a:bodyPr>
           <a:lstStyle/>
@@ -13062,10 +13141,16 @@
               <a:rPr lang="en-IN" sz="2400" dirty="0"/>
               <a:t>Pipeline Tested</a:t>
             </a:r>
+            <a:endParaRPr lang="en-IN" sz="2400" dirty="0"/>
           </a:p>
         </p:txBody>
       </p:sp>
     </p:spTree>
+    <p:extLst>
+      <p:ext uri="{BB962C8B-B14F-4D97-AF65-F5344CB8AC3E}">
+        <p14:creationId xmlns:p14="http://schemas.microsoft.com/office/powerpoint/2010/main" val="333113826"/>
+      </p:ext>
+    </p:extLst>
   </p:cSld>
   <p:clrMapOvr>
     <a:masterClrMapping/>
@@ -13073,7 +13158,7 @@
 </p:sld>
 </file>
 
-<file path=ppt/slides/slide13.xml><?xml version="1.0" encoding="utf-8"?>
+<file path=ppt/slides/slide14.xml><?xml version="1.0" encoding="utf-8"?>
 <p:sld xmlns:a="http://schemas.openxmlformats.org/drawingml/2006/main" xmlns:r="http://schemas.openxmlformats.org/officeDocument/2006/relationships" xmlns:p="http://schemas.openxmlformats.org/presentationml/2006/main">
   <p:cSld>
     <p:spTree>
@@ -13251,7 +13336,6 @@
               <a:rPr lang="en-US" dirty="0"/>
               <a:t>• Cloud security</a:t>
             </a:r>
-            <a:endParaRPr lang="en-US" dirty="0"/>
           </a:p>
         </p:txBody>
       </p:sp>
@@ -13263,7 +13347,7 @@
 </p:sld>
 </file>
 
-<file path=ppt/slides/slide14.xml><?xml version="1.0" encoding="utf-8"?>
+<file path=ppt/slides/slide15.xml><?xml version="1.0" encoding="utf-8"?>
 <p:sld xmlns:a="http://schemas.openxmlformats.org/drawingml/2006/main" xmlns:r="http://schemas.openxmlformats.org/officeDocument/2006/relationships" xmlns:p="http://schemas.openxmlformats.org/presentationml/2006/main">
   <p:cSld>
     <p:spTree>
@@ -13333,7 +13417,7 @@
 </p:sld>
 </file>
 
-<file path=ppt/slides/slide15.xml><?xml version="1.0" encoding="utf-8"?>
+<file path=ppt/slides/slide16.xml><?xml version="1.0" encoding="utf-8"?>
 <p:sld xmlns:a="http://schemas.openxmlformats.org/drawingml/2006/main" xmlns:r="http://schemas.openxmlformats.org/officeDocument/2006/relationships" xmlns:p="http://schemas.openxmlformats.org/presentationml/2006/main">
   <p:cSld>
     <p:spTree>
@@ -13561,7 +13645,6 @@
               <a:rPr lang="en-US" dirty="0"/>
               <a:t>• Automated validation</a:t>
             </a:r>
-            <a:endParaRPr lang="en-US" dirty="0"/>
           </a:p>
         </p:txBody>
       </p:sp>

--- a/Presentation/HabotConnect_Devops_project_ppt.pptx
+++ b/Presentation/HabotConnect_Devops_project_ppt.pptx
@@ -14348,7 +14348,12 @@
             <p:ph idx="1"/>
           </p:nvPr>
         </p:nvSpPr>
-        <p:spPr/>
+        <p:spPr>
+          <a:xfrm>
+            <a:off x="1089740" y="1893887"/>
+            <a:ext cx="7429499" cy="3541714"/>
+          </a:xfrm>
+        </p:spPr>
         <p:txBody>
           <a:bodyPr/>
           <a:lstStyle/>
@@ -14357,22 +14362,43 @@
               <a:defRPr sz="2400"/>
             </a:pPr>
             <a:r>
+              <a:rPr dirty="0"/>
               <a:t>Pipeline immediately stops if:</a:t>
             </a:r>
-            <a:br/>
-            <a:r>
+            <a:br>
+              <a:rPr dirty="0"/>
+            </a:br>
+            <a:r>
+              <a:rPr dirty="0"/>
               <a:t>• Formatting fails</a:t>
             </a:r>
-            <a:br/>
-            <a:r>
-              <a:t>• Linting fails</a:t>
-            </a:r>
-            <a:br/>
-            <a:r>
+            <a:br>
+              <a:rPr dirty="0"/>
+            </a:br>
+            <a:r>
+              <a:rPr dirty="0"/>
+              <a:t>• </a:t>
+            </a:r>
+            <a:r>
+              <a:rPr dirty="0" err="1"/>
+              <a:t>Linting</a:t>
+            </a:r>
+            <a:r>
+              <a:rPr dirty="0"/>
+              <a:t> fails</a:t>
+            </a:r>
+            <a:br>
+              <a:rPr dirty="0"/>
+            </a:br>
+            <a:r>
+              <a:rPr dirty="0"/>
               <a:t>• Hardcoded API key detected</a:t>
             </a:r>
-            <a:br/>
-            <a:r>
+            <a:br>
+              <a:rPr dirty="0"/>
+            </a:br>
+            <a:r>
+              <a:rPr dirty="0"/>
               <a:t>• Terraform validation fails</a:t>
             </a:r>
           </a:p>
